--- a/media/exports/reports/2025-12/volunteers.pptx
+++ b/media/exports/reports/2025-12/volunteers.pptx
@@ -197,22 +197,22 @@
               <c:strCache>
                 <c:ptCount val="6"/>
                 <c:pt idx="0">
-                  <c:v>Mental health first aid</c:v>
+                  <c:v>Volunteer coordinator</c:v>
                 </c:pt>
                 <c:pt idx="1">
-                  <c:v>Volunteer coordinator</c:v>
+                  <c:v>Youth outreach</c:v>
                 </c:pt>
                 <c:pt idx="2">
-                  <c:v>Community meals</c:v>
+                  <c:v>Digital literacy</c:v>
                 </c:pt>
                 <c:pt idx="3">
                   <c:v>Housing support</c:v>
                 </c:pt>
                 <c:pt idx="4">
-                  <c:v>Digital literacy</c:v>
+                  <c:v>Community meals</c:v>
                 </c:pt>
                 <c:pt idx="5">
-                  <c:v>Youth outreach</c:v>
+                  <c:v>Mental health first aid</c:v>
                 </c:pt>
               </c:strCache>
             </c:strRef>
@@ -224,22 +224,22 @@
                 <c:formatCode>#,##0;[Red](#,##0)</c:formatCode>
                 <c:ptCount val="6"/>
                 <c:pt idx="0">
-                  <c:v>81.5</c:v>
+                  <c:v>74.5</c:v>
                 </c:pt>
                 <c:pt idx="1">
-                  <c:v>84.5</c:v>
+                  <c:v>122.0</c:v>
                 </c:pt>
                 <c:pt idx="2">
-                  <c:v>106.0</c:v>
+                  <c:v>124.0</c:v>
                 </c:pt>
                 <c:pt idx="3">
-                  <c:v>127.0</c:v>
+                  <c:v>157.5</c:v>
                 </c:pt>
                 <c:pt idx="4">
-                  <c:v>131.5</c:v>
+                  <c:v>160.5</c:v>
                 </c:pt>
                 <c:pt idx="5">
-                  <c:v>152.5</c:v>
+                  <c:v>192.0</c:v>
                 </c:pt>
               </c:numCache>
             </c:numRef>
@@ -303,7 +303,7 @@
       <c:valAx>
         <c:axId val="-2113994440"/>
         <c:scaling>
-          <c:max val="175.375"/>
+          <c:max val="220.79999999999998"/>
           <c:min val="0.0"/>
         </c:scaling>
         <c:delete/>
@@ -442,49 +442,49 @@
                 <c:formatCode>#,##0;[Red](#,##0)</c:formatCode>
                 <c:ptCount val="15"/>
                 <c:pt idx="0">
-                  <c:v>317.5</c:v>
+                  <c:v>381.0</c:v>
                 </c:pt>
                 <c:pt idx="1">
-                  <c:v>392.0</c:v>
+                  <c:v>373.5</c:v>
                 </c:pt>
                 <c:pt idx="2">
-                  <c:v>363.5</c:v>
+                  <c:v>383.5</c:v>
                 </c:pt>
                 <c:pt idx="3">
-                  <c:v>399.0</c:v>
+                  <c:v>387.5</c:v>
                 </c:pt>
                 <c:pt idx="4">
-                  <c:v>422.0</c:v>
+                  <c:v>376.5</c:v>
                 </c:pt>
                 <c:pt idx="5">
-                  <c:v>451.5</c:v>
+                  <c:v>444.0</c:v>
                 </c:pt>
                 <c:pt idx="6">
-                  <c:v>445.0</c:v>
+                  <c:v>422.5</c:v>
                 </c:pt>
                 <c:pt idx="7">
-                  <c:v>513.0</c:v>
+                  <c:v>562.0</c:v>
                 </c:pt>
                 <c:pt idx="8">
-                  <c:v>529.0</c:v>
+                  <c:v>568.0</c:v>
                 </c:pt>
                 <c:pt idx="9">
-                  <c:v>586.0</c:v>
+                  <c:v>609.5</c:v>
                 </c:pt>
                 <c:pt idx="10">
-                  <c:v>560.5</c:v>
+                  <c:v>627.0</c:v>
                 </c:pt>
                 <c:pt idx="11">
-                  <c:v>625.5</c:v>
+                  <c:v>708.5</c:v>
                 </c:pt>
                 <c:pt idx="12">
-                  <c:v>669.5</c:v>
+                  <c:v>817.0</c:v>
                 </c:pt>
                 <c:pt idx="13">
-                  <c:v>626.5</c:v>
+                  <c:v>780.5</c:v>
                 </c:pt>
                 <c:pt idx="14">
-                  <c:v>683.0</c:v>
+                  <c:v>830.5</c:v>
                 </c:pt>
               </c:numCache>
             </c:numRef>
@@ -533,7 +533,7 @@
         <c:axId val="-2100718248"/>
         <c:scaling>
           <c:orientation val="minMax"/>
-          <c:max val="800.0"/>
+          <c:max val="1000.0"/>
           <c:min val="0.0"/>
         </c:scaling>
         <c:delete val="0"/>
@@ -1058,7 +1058,7 @@
           <a:lstStyle/>
           <a:p>
             <a:r>
-              <a:t>How many volunteer hours go into each program?. Volunteer hours, December: 683.0 h; Volunteers who did a shift, December: 46; Hours per volunteer, December: 14.8 h; December last year: 363.5 h. 46 volunteers gave 683.0 h in December, against 626.5 h in November. Youth outreach drew the most (152.5 h, 22.3%). Mental health first aid had the fewest volunteer hours (81.5 h). Hours are up 87.9% on December last year.</a:t>
+              <a:t>How many volunteer hours go into each program?. Volunteer hours, December: 830.5 h; Volunteers who did a shift, December: 55; Hours per volunteer, December: 15.1 h; December last year: 383.5 h. 55 volunteers gave 830.5 h in December, against 780.5 h in November. Mental health first aid drew the most (192.0 h, 23.1%). Volunteer coordinator had the fewest volunteer hours (74.5 h). Hours are up 116.6% on December last year.</a:t>
             </a:r>
           </a:p>
         </p:txBody>
@@ -4543,7 +4543,7 @@
                 </a:solidFill>
                 <a:latin typeface="Roboto"/>
               </a:rPr>
-              <a:t>Data retrieved 2pm, Tue 6 Oct 2026 · Generated 8 Oct 2026, 6:29pm · Sample data · Made with Python (python-pptx)</a:t>
+              <a:t>Data retrieved 2pm, Tue 6 Oct 2026 · Generated 8 Oct 2026, 11:41pm · Sample data · Made with Python (python-pptx)</a:t>
             </a:r>
           </a:p>
         </p:txBody>
@@ -4889,7 +4889,7 @@
                 </a:solidFill>
                 <a:latin typeface="Roboto"/>
               </a:rPr>
-              <a:t>683.0 h</a:t>
+              <a:t>830.5 h</a:t>
             </a:r>
           </a:p>
         </p:txBody>
@@ -4928,7 +4928,7 @@
                 </a:solidFill>
                 <a:latin typeface="Roboto"/>
               </a:rPr>
-              <a:t>November 626.5 h</a:t>
+              <a:t>November 780.5 h</a:t>
             </a:r>
           </a:p>
         </p:txBody>
@@ -5055,7 +5055,7 @@
                 </a:solidFill>
                 <a:latin typeface="Roboto"/>
               </a:rPr>
-              <a:t>46</a:t>
+              <a:t>55</a:t>
             </a:r>
           </a:p>
         </p:txBody>
@@ -5094,7 +5094,7 @@
                 </a:solidFill>
                 <a:latin typeface="Roboto"/>
               </a:rPr>
-              <a:t>November 43</a:t>
+              <a:t>November 56</a:t>
             </a:r>
           </a:p>
         </p:txBody>
@@ -5221,7 +5221,7 @@
                 </a:solidFill>
                 <a:latin typeface="Roboto"/>
               </a:rPr>
-              <a:t>14.8 h</a:t>
+              <a:t>15.1 h</a:t>
             </a:r>
           </a:p>
         </p:txBody>
@@ -5387,7 +5387,7 @@
                 </a:solidFill>
                 <a:latin typeface="Roboto"/>
               </a:rPr>
-              <a:t>363.5 h</a:t>
+              <a:t>383.5 h</a:t>
             </a:r>
           </a:p>
         </p:txBody>
@@ -5426,7 +5426,7 @@
                 </a:solidFill>
                 <a:latin typeface="Roboto"/>
               </a:rPr>
-              <a:t>28 volunteers</a:t>
+              <a:t>26 volunteers</a:t>
             </a:r>
           </a:p>
         </p:txBody>
@@ -5571,7 +5571,7 @@
                 </a:solidFill>
                 <a:latin typeface="Roboto"/>
               </a:rPr>
-              <a:t>46 volunteers gave 683.0 h in December, against 626.5 h in November. Youth outreach drew the most (152.5 h, 22.3%).</a:t>
+              <a:t>55 volunteers gave 830.5 h in December, against 780.5 h in November. Mental health first aid drew the most (192.0 h, 23.1%).</a:t>
             </a:r>
           </a:p>
         </p:txBody>
@@ -5698,7 +5698,7 @@
                 </a:solidFill>
                 <a:latin typeface="Roboto"/>
               </a:rPr>
-              <a:t>Mental health first aid had the fewest volunteer hours (81.5 h). Hours are up 87.9% on December last year.</a:t>
+              <a:t>Volunteer coordinator had the fewest volunteer hours (74.5 h). Hours are up 116.6% on December last year.</a:t>
             </a:r>
           </a:p>
         </p:txBody>
@@ -5776,7 +5776,7 @@
                 </a:solidFill>
                 <a:latin typeface="Roboto"/>
               </a:rPr>
-              <a:t>Data retrieved 2pm, Tue 6 Oct 2026 · Generated 8 Oct 2026, 6:29pm · Sample data · Made with Python (python-pptx)</a:t>
+              <a:t>Data retrieved 2pm, Tue 6 Oct 2026 · Generated 8 Oct 2026, 11:41pm · Sample data · Made with Python (python-pptx)</a:t>
             </a:r>
           </a:p>
         </p:txBody>
@@ -6091,7 +6091,7 @@
                 </a:solidFill>
                 <a:latin typeface="Roboto"/>
               </a:rPr>
-              <a:t>Data retrieved 2pm, Tue 6 Oct 2026 · Generated 8 Oct 2026, 6:29pm · Sample data · Made with Python (python-pptx)</a:t>
+              <a:t>Data retrieved 2pm, Tue 6 Oct 2026 · Generated 8 Oct 2026, 11:41pm · Sample data · Made with Python (python-pptx)</a:t>
             </a:r>
           </a:p>
         </p:txBody>

--- a/media/exports/reports/2025-12/volunteers.pptx
+++ b/media/exports/reports/2025-12/volunteers.pptx
@@ -988,7 +988,7 @@
           <a:lstStyle/>
           <a:p>
             <a:r>
-              <a:t>How many volunteer hours go into each program?. Sample Community Services Ltd. Period: December 2025. Every volunteer shift: who (a code, not a name), which program, and how many hours.</a:t>
+              <a:t>How many volunteer hours go into each program?. Sample Community Services Ltd. Period: December 2025. In short: 830.5 h of volunteer time in December, from 55 volunteers; most went to Mental health first aid. Every volunteer shift: who (a code, not a name), which program, and how many hours.</a:t>
             </a:r>
           </a:p>
         </p:txBody>
@@ -4353,7 +4353,7 @@
         <p:spPr>
           <a:xfrm>
             <a:off x="457200" y="3703320"/>
-            <a:ext cx="11277295" cy="313690"/>
+            <a:ext cx="11277295" cy="535940"/>
           </a:xfrm>
           <a:prstGeom prst="rect">
             <a:avLst/>
@@ -4378,7 +4378,7 @@
                 </a:solidFill>
                 <a:latin typeface="Roboto"/>
               </a:rPr>
-              <a:t>Period: December 2025. Every volunteer shift: who (a code, not a name), which program, and how many hours.</a:t>
+              <a:t>Period: December 2025. In short: 830.5 h of volunteer time in December, from 55 volunteers; most went to Mental health first aid. Every volunteer shift: who (a code, not a name), which program, and how many hours.</a:t>
             </a:r>
           </a:p>
         </p:txBody>
@@ -4391,7 +4391,7 @@
         </p:nvSpPr>
         <p:spPr>
           <a:xfrm>
-            <a:off x="457200" y="4108450"/>
+            <a:off x="457200" y="4330700"/>
             <a:ext cx="11277295" cy="1097280"/>
           </a:xfrm>
           <a:prstGeom prst="rect">
@@ -4543,7 +4543,7 @@
                 </a:solidFill>
                 <a:latin typeface="Roboto"/>
               </a:rPr>
-              <a:t>Data retrieved 2pm, Tue 6 Oct 2026 · Generated 8 Oct 2026, 11:41pm · Sample data · Made with Python (python-pptx)</a:t>
+              <a:t>Data retrieved 2pm, Tue 6 Oct 2026 · Generated 10 Oct 2026, 9:55pm · Sample data · Made with Python (python-pptx)</a:t>
             </a:r>
           </a:p>
         </p:txBody>
@@ -5776,7 +5776,7 @@
                 </a:solidFill>
                 <a:latin typeface="Roboto"/>
               </a:rPr>
-              <a:t>Data retrieved 2pm, Tue 6 Oct 2026 · Generated 8 Oct 2026, 11:41pm · Sample data · Made with Python (python-pptx)</a:t>
+              <a:t>Data retrieved 2pm, Tue 6 Oct 2026 · Generated 10 Oct 2026, 9:55pm · Sample data · Made with Python (python-pptx)</a:t>
             </a:r>
           </a:p>
         </p:txBody>
@@ -6091,7 +6091,7 @@
                 </a:solidFill>
                 <a:latin typeface="Roboto"/>
               </a:rPr>
-              <a:t>Data retrieved 2pm, Tue 6 Oct 2026 · Generated 8 Oct 2026, 11:41pm · Sample data · Made with Python (python-pptx)</a:t>
+              <a:t>Data retrieved 2pm, Tue 6 Oct 2026 · Generated 10 Oct 2026, 9:55pm · Sample data · Made with Python (python-pptx)</a:t>
             </a:r>
           </a:p>
         </p:txBody>
